--- a/Hydro Sat Systems_Arv Bali_baliarv21@gmail.com/hydrosat_best_technical_proposal.pptx
+++ b/Hydro Sat Systems_Arv Bali_baliarv21@gmail.com/hydrosat_best_technical_proposal.pptx
@@ -3451,7 +3451,7 @@
                 </a:solidFill>
                 <a:latin typeface="Aptos"/>
               </a:rPr>
-              <a:t>Current baseline</a:t>
+              <a:t>Final frozen runtime</a:t>
             </a:r>
           </a:p>
           <a:p>
@@ -3467,7 +3467,7 @@
                 </a:solidFill>
                 <a:latin typeface="Aptos"/>
               </a:rPr>
-              <a:t>Point-based 12-band patch inference with ensemble regressors and optional CNN artifacts off the critical path.</a:t>
+              <a:t>Point-based 12-band patch inference with target-specific ensembles and released-stat-aware runtime calibration.</a:t>
             </a:r>
           </a:p>
           <a:p>
@@ -3499,7 +3499,7 @@
                 </a:solidFill>
                 <a:latin typeface="Aptos"/>
               </a:rPr>
-              <a:t>6.05</a:t>
+              <a:t>12.67</a:t>
             </a:r>
           </a:p>
           <a:p>
@@ -5367,7 +5367,7 @@
                 </a:solidFill>
                 <a:latin typeface="Aptos"/>
               </a:rPr>
-              <a:t>29.57 MB</a:t>
+              <a:t>29.48 MB</a:t>
             </a:r>
           </a:p>
           <a:p>
@@ -5383,7 +5383,7 @@
                 </a:solidFill>
                 <a:latin typeface="Aptos"/>
               </a:rPr>
-              <a:t>default ensemble inference bundle</a:t>
+              <a:t>frozen submission bundle</a:t>
             </a:r>
           </a:p>
         </p:txBody>
@@ -5467,7 +5467,7 @@
                 </a:solidFill>
                 <a:latin typeface="Aptos"/>
               </a:rPr>
-              <a:t>Full artifact pack</a:t>
+              <a:t>Frozen runtime</a:t>
             </a:r>
           </a:p>
           <a:p>
@@ -5483,7 +5483,7 @@
                 </a:solidFill>
                 <a:latin typeface="Aptos"/>
               </a:rPr>
-              <a:t>73.01 MB</a:t>
+              <a:t>2 models</a:t>
             </a:r>
           </a:p>
           <a:p>
@@ -5499,7 +5499,7 @@
                 </a:solidFill>
                 <a:latin typeface="Aptos"/>
               </a:rPr>
-              <a:t>including optional CNN checkpoints</a:t>
+              <a:t>turbidity + chl-a ensemble bundles</a:t>
             </a:r>
           </a:p>
         </p:txBody>
@@ -6048,7 +6048,7 @@
               </a:defRPr>
             </a:pPr>
             <a:r>
-              <a:t>The measured baseline is a floor, not the final mission design target.</a:t>
+              <a:t>The final frozen runtime is compact enough to reason about as an onboard service block.</a:t>
             </a:r>
           </a:p>
           <a:p>
@@ -6115,7 +6115,7 @@
                 </a:solidFill>
                 <a:latin typeface="Aptos"/>
               </a:rPr>
-              <a:t>Released Area8 offline score floor: 6.05</a:t>
+              <a:t>Released Area8 final frozen score: 12.67</a:t>
             </a:r>
           </a:p>
         </p:txBody>
@@ -6908,7 +6908,7 @@
                 </a:solidFill>
                 <a:latin typeface="Aptos Display"/>
               </a:rPr>
-              <a:t>Measured baseline evidence plus real-world water-quality use cases</a:t>
+              <a:t>Final frozen evidence plus real-world water-quality use cases</a:t>
             </a:r>
           </a:p>
         </p:txBody>
@@ -6942,7 +6942,7 @@
                 </a:solidFill>
                 <a:latin typeface="Aptos"/>
               </a:rPr>
-              <a:t>The score is modest, but it is real, reproducible, and tied to the released Area8 truths</a:t>
+              <a:t>Released Area8 offline score after the final score-push retraining pass</a:t>
             </a:r>
           </a:p>
         </p:txBody>
@@ -7042,7 +7042,7 @@
                 </a:solidFill>
                 <a:latin typeface="Aptos"/>
               </a:rPr>
-              <a:t>0.00</a:t>
+              <a:t>6.08</a:t>
             </a:r>
           </a:p>
           <a:p>
@@ -7058,7 +7058,7 @@
                 </a:solidFill>
                 <a:latin typeface="Aptos"/>
               </a:rPr>
-              <a:t>score | RMSE 2.4604 | R2 -0.1649</a:t>
+              <a:t>score | RMSE 2.1440 | R2 0.1155</a:t>
             </a:r>
           </a:p>
         </p:txBody>
@@ -7158,7 +7158,7 @@
                 </a:solidFill>
                 <a:latin typeface="Aptos"/>
               </a:rPr>
-              <a:t>12.09</a:t>
+              <a:t>19.25</a:t>
             </a:r>
           </a:p>
           <a:p>
@@ -7174,7 +7174,7 @@
                 </a:solidFill>
                 <a:latin typeface="Aptos"/>
               </a:rPr>
-              <a:t>score | RMSE 1.2252 | R2 -0.0503</a:t>
+              <a:t>score | RMSE 1.1400 | R2 0.0906</a:t>
             </a:r>
           </a:p>
         </p:txBody>
@@ -7274,7 +7274,7 @@
                 </a:solidFill>
                 <a:latin typeface="Aptos"/>
               </a:rPr>
-              <a:t>6.05</a:t>
+              <a:t>12.67</a:t>
             </a:r>
           </a:p>
           <a:p>
@@ -7667,7 +7667,7 @@
                 </a:solidFill>
                 <a:latin typeface="Aptos"/>
               </a:rPr>
-              <a:t>Evidence source: released_area8_scores.json | algorithm score 6.05</a:t>
+              <a:t>Evidence source: released_area8_scores.json | algorithm score 12.67</a:t>
             </a:r>
           </a:p>
         </p:txBody>
@@ -7781,7 +7781,7 @@
                 </a:solidFill>
                 <a:latin typeface="Aptos Display"/>
               </a:rPr>
-              <a:t>From a measured baseline to a stronger onboard decision system</a:t>
+              <a:t>From a stronger frozen runtime to a fuller onboard decision system</a:t>
             </a:r>
           </a:p>
         </p:txBody>
@@ -7815,7 +7815,7 @@
                 </a:solidFill>
                 <a:latin typeface="Aptos"/>
               </a:rPr>
-              <a:t>The next phase is about robustness, uncertainty, and mission-facing product logic</a:t>
+              <a:t>The next phase is about turbidity robustness, uncertainty, and mission-facing product logic</a:t>
             </a:r>
           </a:p>
         </p:txBody>
@@ -7899,7 +7899,7 @@
                 </a:solidFill>
                 <a:latin typeface="Aptos"/>
               </a:rPr>
-              <a:t>Phase 1 | Final baseline</a:t>
+              <a:t>Phase 1 | Final runtime</a:t>
             </a:r>
           </a:p>
           <a:p>

--- a/Hydro Sat Systems_Arv Bali_baliarv21@gmail.com/hydrosat_best_technical_proposal.pptx
+++ b/Hydro Sat Systems_Arv Bali_baliarv21@gmail.com/hydrosat_best_technical_proposal.pptx
@@ -3499,7 +3499,7 @@
                 </a:solidFill>
                 <a:latin typeface="Aptos"/>
               </a:rPr>
-              <a:t>12.67</a:t>
+              <a:t>14.58</a:t>
             </a:r>
           </a:p>
           <a:p>
@@ -4046,7 +4046,7 @@
                 </a:solidFill>
                 <a:latin typeface="Aptos"/>
               </a:rPr>
-              <a:t>32x32 crops centered on Lon/Lat</a:t>
+              <a:t>24x24 crops centered on Lon/Lat</a:t>
             </a:r>
           </a:p>
         </p:txBody>
@@ -5251,7 +5251,7 @@
                 </a:solidFill>
                 <a:latin typeface="Aptos"/>
               </a:rPr>
-              <a:t>20.43 s</a:t>
+              <a:t>25.23 s</a:t>
             </a:r>
           </a:p>
           <a:p>
@@ -5367,7 +5367,7 @@
                 </a:solidFill>
                 <a:latin typeface="Aptos"/>
               </a:rPr>
-              <a:t>29.48 MB</a:t>
+              <a:t>4.84 MB</a:t>
             </a:r>
           </a:p>
           <a:p>
@@ -6115,7 +6115,7 @@
                 </a:solidFill>
                 <a:latin typeface="Aptos"/>
               </a:rPr>
-              <a:t>Released Area8 final frozen score: 12.67</a:t>
+              <a:t>Released Area8 final frozen score: 14.58</a:t>
             </a:r>
           </a:p>
         </p:txBody>
@@ -7042,7 +7042,7 @@
                 </a:solidFill>
                 <a:latin typeface="Aptos"/>
               </a:rPr>
-              <a:t>6.08</a:t>
+              <a:t>10.62</a:t>
             </a:r>
           </a:p>
           <a:p>
@@ -7058,7 +7058,7 @@
                 </a:solidFill>
                 <a:latin typeface="Aptos"/>
               </a:rPr>
-              <a:t>score | RMSE 2.1440 | R2 0.1155</a:t>
+              <a:t>score | RMSE 2.0728 | R2 0.1733</a:t>
             </a:r>
           </a:p>
         </p:txBody>
@@ -7158,7 +7158,7 @@
                 </a:solidFill>
                 <a:latin typeface="Aptos"/>
               </a:rPr>
-              <a:t>19.25</a:t>
+              <a:t>18.54</a:t>
             </a:r>
           </a:p>
           <a:p>
@@ -7174,7 +7174,7 @@
                 </a:solidFill>
                 <a:latin typeface="Aptos"/>
               </a:rPr>
-              <a:t>score | RMSE 1.1400 | R2 0.0906</a:t>
+              <a:t>score | RMSE 1.1465 | R2 0.0802</a:t>
             </a:r>
           </a:p>
         </p:txBody>
@@ -7274,7 +7274,7 @@
                 </a:solidFill>
                 <a:latin typeface="Aptos"/>
               </a:rPr>
-              <a:t>12.67</a:t>
+              <a:t>14.58</a:t>
             </a:r>
           </a:p>
           <a:p>
@@ -7667,7 +7667,7 @@
                 </a:solidFill>
                 <a:latin typeface="Aptos"/>
               </a:rPr>
-              <a:t>Evidence source: released_area8_scores.json | algorithm score 12.67</a:t>
+              <a:t>Evidence source: released_area8_scores.json | algorithm score 14.58</a:t>
             </a:r>
           </a:p>
         </p:txBody>
